--- a/Reviewing_GitHub_code_first (2).pptx
+++ b/Reviewing_GitHub_code_first (2).pptx
@@ -15219,18 +15219,18 @@
             </a:avLst>
           </a:prstGeom>
           <a:solidFill>
-            <a:srgbClr val="FFF3D0"/>
+            <a:srgbClr val="FFFFFF"/>
           </a:solidFill>
           <a:ln w="19050">
             <a:solidFill>
-              <a:srgbClr val="E0A500"/>
+              <a:srgbClr val="D9D0C4"/>
             </a:solidFill>
             <a:prstDash val="solid"/>
           </a:ln>
           <a:effectLst>
             <a:outerShdw sx="100000" sy="100000" kx="0" ky="0" algn="bl" rotWithShape="0" blurRad="101600" dist="50800" dir="16200000">
               <a:srgbClr val="E0A500">
-                <a:alpha val="12000"/>
+                <a:alpha val="8200"/>
               </a:srgbClr>
             </a:outerShdw>
           </a:effectLst>
@@ -15265,7 +15265,7 @@
             <a:r>
               <a:rPr lang="en-US" sz="1650" b="1" dirty="0">
                 <a:solidFill>
-                  <a:srgbClr val="7A5B00"/>
+                  <a:srgbClr val="171717"/>
                 </a:solidFill>
                 <a:latin typeface="Courier New" pitchFamily="34" charset="0"/>
                 <a:ea typeface="Courier New" pitchFamily="34" charset="-122"/>
@@ -15294,18 +15294,18 @@
             </a:avLst>
           </a:prstGeom>
           <a:solidFill>
-            <a:srgbClr val="FFF3D0"/>
+            <a:srgbClr val="FFFFFF"/>
           </a:solidFill>
           <a:ln w="19050">
             <a:solidFill>
-              <a:srgbClr val="E0A500"/>
+              <a:srgbClr val="D9D0C4"/>
             </a:solidFill>
             <a:prstDash val="solid"/>
           </a:ln>
           <a:effectLst>
             <a:outerShdw sx="100000" sy="100000" kx="0" ky="0" algn="bl" rotWithShape="0" blurRad="101600" dist="50800" dir="16200000">
               <a:srgbClr val="E0A500">
-                <a:alpha val="12000"/>
+                <a:alpha val="8200"/>
               </a:srgbClr>
             </a:outerShdw>
           </a:effectLst>
@@ -15340,7 +15340,7 @@
             <a:r>
               <a:rPr lang="en-US" sz="1650" b="1" dirty="0">
                 <a:solidFill>
-                  <a:srgbClr val="7A5B00"/>
+                  <a:srgbClr val="171717"/>
                 </a:solidFill>
                 <a:latin typeface="Courier New" pitchFamily="34" charset="0"/>
                 <a:ea typeface="Courier New" pitchFamily="34" charset="-122"/>
@@ -15369,18 +15369,18 @@
             </a:avLst>
           </a:prstGeom>
           <a:solidFill>
-            <a:srgbClr val="FFF3D0"/>
+            <a:srgbClr val="FFFFFF"/>
           </a:solidFill>
           <a:ln w="19050">
             <a:solidFill>
-              <a:srgbClr val="E0A500"/>
+              <a:srgbClr val="D9D0C4"/>
             </a:solidFill>
             <a:prstDash val="solid"/>
           </a:ln>
           <a:effectLst>
             <a:outerShdw sx="100000" sy="100000" kx="0" ky="0" algn="bl" rotWithShape="0" blurRad="101600" dist="50800" dir="16200000">
               <a:srgbClr val="E0A500">
-                <a:alpha val="12000"/>
+                <a:alpha val="8200"/>
               </a:srgbClr>
             </a:outerShdw>
           </a:effectLst>
@@ -15415,7 +15415,7 @@
             <a:r>
               <a:rPr lang="en-US" sz="1650" b="1" dirty="0">
                 <a:solidFill>
-                  <a:srgbClr val="7A5B00"/>
+                  <a:srgbClr val="171717"/>
                 </a:solidFill>
                 <a:latin typeface="Courier New" pitchFamily="34" charset="0"/>
                 <a:ea typeface="Courier New" pitchFamily="34" charset="-122"/>
